--- a/Software Project Management/07.03. Deployment Management.pptx
+++ b/Software Project Management/07.03. Deployment Management.pptx
@@ -203,7 +203,7 @@
             <a:fld id="{AF65A07A-007E-44B5-AC55-C7CD3A7B6CED}" type="datetimeFigureOut">
               <a:rPr lang="en-US" smtClean="0"/>
               <a:pPr/>
-              <a:t>7/30/2026</a:t>
+              <a:t>8/16/2026</a:t>
             </a:fld>
             <a:endParaRPr lang="en-US"/>
           </a:p>
@@ -733,7 +733,7 @@
             <a:fld id="{A041A23D-F085-49F6-8F45-AC65895BA8C4}" type="datetimeFigureOut">
               <a:rPr lang="en-US" smtClean="0"/>
               <a:pPr/>
-              <a:t>7/30/2026</a:t>
+              <a:t>8/16/2026</a:t>
             </a:fld>
             <a:endParaRPr lang="en-US"/>
           </a:p>
@@ -900,7 +900,7 @@
             <a:fld id="{A041A23D-F085-49F6-8F45-AC65895BA8C4}" type="datetimeFigureOut">
               <a:rPr lang="en-US" smtClean="0"/>
               <a:pPr/>
-              <a:t>7/30/2026</a:t>
+              <a:t>8/16/2026</a:t>
             </a:fld>
             <a:endParaRPr lang="en-US"/>
           </a:p>
@@ -1077,7 +1077,7 @@
             <a:fld id="{A041A23D-F085-49F6-8F45-AC65895BA8C4}" type="datetimeFigureOut">
               <a:rPr lang="en-US" smtClean="0"/>
               <a:pPr/>
-              <a:t>7/30/2026</a:t>
+              <a:t>8/16/2026</a:t>
             </a:fld>
             <a:endParaRPr lang="en-US"/>
           </a:p>
@@ -1244,7 +1244,7 @@
             <a:fld id="{A041A23D-F085-49F6-8F45-AC65895BA8C4}" type="datetimeFigureOut">
               <a:rPr lang="en-US" smtClean="0"/>
               <a:pPr/>
-              <a:t>7/30/2026</a:t>
+              <a:t>8/16/2026</a:t>
             </a:fld>
             <a:endParaRPr lang="en-US"/>
           </a:p>
@@ -1487,7 +1487,7 @@
             <a:fld id="{A041A23D-F085-49F6-8F45-AC65895BA8C4}" type="datetimeFigureOut">
               <a:rPr lang="en-US" smtClean="0"/>
               <a:pPr/>
-              <a:t>7/30/2026</a:t>
+              <a:t>8/16/2026</a:t>
             </a:fld>
             <a:endParaRPr lang="en-US"/>
           </a:p>
@@ -1772,7 +1772,7 @@
             <a:fld id="{A041A23D-F085-49F6-8F45-AC65895BA8C4}" type="datetimeFigureOut">
               <a:rPr lang="en-US" smtClean="0"/>
               <a:pPr/>
-              <a:t>7/30/2026</a:t>
+              <a:t>8/16/2026</a:t>
             </a:fld>
             <a:endParaRPr lang="en-US"/>
           </a:p>
@@ -2191,7 +2191,7 @@
             <a:fld id="{A041A23D-F085-49F6-8F45-AC65895BA8C4}" type="datetimeFigureOut">
               <a:rPr lang="en-US" smtClean="0"/>
               <a:pPr/>
-              <a:t>7/30/2026</a:t>
+              <a:t>8/16/2026</a:t>
             </a:fld>
             <a:endParaRPr lang="en-US"/>
           </a:p>
@@ -2306,7 +2306,7 @@
             <a:fld id="{A041A23D-F085-49F6-8F45-AC65895BA8C4}" type="datetimeFigureOut">
               <a:rPr lang="en-US" smtClean="0"/>
               <a:pPr/>
-              <a:t>7/30/2026</a:t>
+              <a:t>8/16/2026</a:t>
             </a:fld>
             <a:endParaRPr lang="en-US"/>
           </a:p>
@@ -2398,7 +2398,7 @@
             <a:fld id="{A041A23D-F085-49F6-8F45-AC65895BA8C4}" type="datetimeFigureOut">
               <a:rPr lang="en-US" smtClean="0"/>
               <a:pPr/>
-              <a:t>7/30/2026</a:t>
+              <a:t>8/16/2026</a:t>
             </a:fld>
             <a:endParaRPr lang="en-US"/>
           </a:p>
@@ -2672,7 +2672,7 @@
             <a:fld id="{A041A23D-F085-49F6-8F45-AC65895BA8C4}" type="datetimeFigureOut">
               <a:rPr lang="en-US" smtClean="0"/>
               <a:pPr/>
-              <a:t>7/30/2026</a:t>
+              <a:t>8/16/2026</a:t>
             </a:fld>
             <a:endParaRPr lang="en-US"/>
           </a:p>
@@ -2922,7 +2922,7 @@
             <a:fld id="{A041A23D-F085-49F6-8F45-AC65895BA8C4}" type="datetimeFigureOut">
               <a:rPr lang="en-US" smtClean="0"/>
               <a:pPr/>
-              <a:t>7/30/2026</a:t>
+              <a:t>8/16/2026</a:t>
             </a:fld>
             <a:endParaRPr lang="en-US"/>
           </a:p>
@@ -3132,7 +3132,7 @@
             <a:fld id="{A041A23D-F085-49F6-8F45-AC65895BA8C4}" type="datetimeFigureOut">
               <a:rPr lang="en-US" smtClean="0"/>
               <a:pPr/>
-              <a:t>7/30/2026</a:t>
+              <a:t>8/16/2026</a:t>
             </a:fld>
             <a:endParaRPr lang="en-US"/>
           </a:p>
@@ -3527,7 +3527,6 @@
               <a:rPr lang="en-US" sz="6000" dirty="0" smtClean="0"/>
               <a:t>Deployment Management</a:t>
             </a:r>
-            <a:endParaRPr lang="en-US" sz="6000" dirty="0" smtClean="0"/>
           </a:p>
         </p:txBody>
       </p:sp>
@@ -3698,13 +3697,7 @@
               <a:rPr lang="en-US" dirty="0" smtClean="0">
                 <a:hlinkClick r:id="rId2"/>
               </a:rPr>
-              <a:t>https://</a:t>
-            </a:r>
-            <a:r>
-              <a:rPr lang="en-US" dirty="0" smtClean="0">
-                <a:hlinkClick r:id="rId2"/>
-              </a:rPr>
-              <a:t>github.com/brikis98/devops-book</a:t>
+              <a:t>https://github.com/brikis98/devops-book</a:t>
             </a:r>
             <a:endParaRPr lang="en-US" dirty="0" smtClean="0"/>
           </a:p>
@@ -3874,15 +3867,7 @@
             </a:pPr>
             <a:r>
               <a:rPr lang="en-US" sz="2400" dirty="0" smtClean="0"/>
-              <a:t>To </a:t>
-            </a:r>
-            <a:r>
-              <a:rPr lang="en-US" sz="2400" dirty="0" smtClean="0"/>
-              <a:t>implement</a:t>
-            </a:r>
-            <a:r>
-              <a:rPr lang="en-US" sz="2400" dirty="0" smtClean="0"/>
-              <a:t> </a:t>
+              <a:t>To implement </a:t>
             </a:r>
             <a:r>
               <a:rPr lang="en-US" sz="2400" i="1" dirty="0" smtClean="0">
@@ -3890,21 +3875,12 @@
                   <a:srgbClr val="C00000"/>
                 </a:solidFill>
               </a:rPr>
-              <a:t>continuous </a:t>
-            </a:r>
-            <a:r>
-              <a:rPr lang="en-US" sz="2400" i="1" dirty="0" smtClean="0">
-                <a:solidFill>
-                  <a:srgbClr val="C00000"/>
-                </a:solidFill>
-              </a:rPr>
-              <a:t>delivery</a:t>
+              <a:t>continuous delivery</a:t>
             </a:r>
             <a:r>
               <a:rPr lang="en-US" sz="2400" dirty="0" smtClean="0"/>
               <a:t>.</a:t>
             </a:r>
-            <a:endParaRPr lang="en-US" sz="2400" dirty="0" smtClean="0"/>
           </a:p>
         </p:txBody>
       </p:sp>
@@ -4185,13 +4161,8 @@
             </a:r>
             <a:r>
               <a:rPr lang="en-US" sz="2400" dirty="0" smtClean="0"/>
-              <a:t> and Software Delivery. O'Reilly </a:t>
-            </a:r>
-            <a:r>
-              <a:rPr lang="en-US" sz="2400" dirty="0" smtClean="0"/>
-              <a:t>Media.</a:t>
-            </a:r>
-            <a:endParaRPr lang="en-US" sz="2400" dirty="0" smtClean="0"/>
+              <a:t> and Software Delivery. O'Reilly Media.</a:t>
+            </a:r>
           </a:p>
         </p:txBody>
       </p:sp>

--- a/Software Project Management/07.03. Deployment Management.pptx
+++ b/Software Project Management/07.03. Deployment Management.pptx
@@ -5,20 +5,24 @@
     <p:sldMasterId id="2147483648" r:id="rId1"/>
   </p:sldMasterIdLst>
   <p:notesMasterIdLst>
-    <p:notesMasterId r:id="rId13"/>
+    <p:notesMasterId r:id="rId17"/>
   </p:notesMasterIdLst>
   <p:sldIdLst>
     <p:sldId id="331" r:id="rId2"/>
     <p:sldId id="332" r:id="rId3"/>
     <p:sldId id="333" r:id="rId4"/>
     <p:sldId id="334" r:id="rId5"/>
-    <p:sldId id="335" r:id="rId6"/>
-    <p:sldId id="336" r:id="rId7"/>
-    <p:sldId id="337" r:id="rId8"/>
-    <p:sldId id="339" r:id="rId9"/>
-    <p:sldId id="338" r:id="rId10"/>
-    <p:sldId id="340" r:id="rId11"/>
-    <p:sldId id="308" r:id="rId12"/>
+    <p:sldId id="342" r:id="rId6"/>
+    <p:sldId id="343" r:id="rId7"/>
+    <p:sldId id="344" r:id="rId8"/>
+    <p:sldId id="345" r:id="rId9"/>
+    <p:sldId id="335" r:id="rId10"/>
+    <p:sldId id="336" r:id="rId11"/>
+    <p:sldId id="337" r:id="rId12"/>
+    <p:sldId id="339" r:id="rId13"/>
+    <p:sldId id="338" r:id="rId14"/>
+    <p:sldId id="340" r:id="rId15"/>
+    <p:sldId id="308" r:id="rId16"/>
   </p:sldIdLst>
   <p:sldSz cx="9144000" cy="6858000" type="screen4x3"/>
   <p:notesSz cx="6858000" cy="9144000"/>
@@ -3672,7 +3676,15 @@
           <a:p>
             <a:r>
               <a:rPr lang="en-US" dirty="0" smtClean="0"/>
-              <a:t>Code</a:t>
+              <a:t>Deploy an App via </a:t>
+            </a:r>
+            <a:r>
+              <a:rPr lang="en-US" dirty="0" err="1" smtClean="0"/>
+              <a:t>IaaS</a:t>
+            </a:r>
+            <a:r>
+              <a:rPr lang="en-US" dirty="0" smtClean="0"/>
+              <a:t> (AWS)</a:t>
             </a:r>
             <a:endParaRPr lang="en-US" dirty="0"/>
           </a:p>
@@ -3693,16 +3705,7 @@
           <a:bodyPr/>
           <a:lstStyle/>
           <a:p>
-            <a:r>
-              <a:rPr lang="en-US" dirty="0" smtClean="0">
-                <a:hlinkClick r:id="rId2"/>
-              </a:rPr>
-              <a:t>https://github.com/brikis98/devops-book</a:t>
-            </a:r>
-            <a:endParaRPr lang="en-US" dirty="0" smtClean="0"/>
-          </a:p>
-          <a:p>
-            <a:endParaRPr lang="en-US" dirty="0"/>
+            <a:endParaRPr lang="en-US"/>
           </a:p>
         </p:txBody>
       </p:sp>
@@ -3715,6 +3718,391 @@
 </file>
 
 <file path=ppt/slides/slide11.xml><?xml version="1.0" encoding="utf-8"?>
+<p:sld xmlns:a="http://schemas.openxmlformats.org/drawingml/2006/main" xmlns:r="http://schemas.openxmlformats.org/officeDocument/2006/relationships" xmlns:p="http://schemas.openxmlformats.org/presentationml/2006/main">
+  <p:cSld>
+    <p:spTree>
+      <p:nvGrpSpPr>
+        <p:cNvPr id="1" name=""/>
+        <p:cNvGrpSpPr/>
+        <p:nvPr/>
+      </p:nvGrpSpPr>
+      <p:grpSpPr>
+        <a:xfrm>
+          <a:off x="0" y="0"/>
+          <a:ext cx="0" cy="0"/>
+          <a:chOff x="0" y="0"/>
+          <a:chExt cx="0" cy="0"/>
+        </a:xfrm>
+      </p:grpSpPr>
+      <p:sp>
+        <p:nvSpPr>
+          <p:cNvPr id="2" name="Title 1"/>
+          <p:cNvSpPr>
+            <a:spLocks noGrp="1"/>
+          </p:cNvSpPr>
+          <p:nvPr>
+            <p:ph type="title"/>
+          </p:nvPr>
+        </p:nvSpPr>
+        <p:spPr/>
+        <p:txBody>
+          <a:bodyPr/>
+          <a:lstStyle/>
+          <a:p>
+            <a:r>
+              <a:rPr lang="en-US" dirty="0" err="1" smtClean="0"/>
+              <a:t>DevOps</a:t>
+            </a:r>
+            <a:r>
+              <a:rPr lang="en-US" dirty="0" smtClean="0"/>
+              <a:t> (I) [1]</a:t>
+            </a:r>
+            <a:endParaRPr lang="en-US" dirty="0"/>
+          </a:p>
+        </p:txBody>
+      </p:sp>
+      <p:sp>
+        <p:nvSpPr>
+          <p:cNvPr id="3" name="Content Placeholder 2"/>
+          <p:cNvSpPr>
+            <a:spLocks noGrp="1"/>
+          </p:cNvSpPr>
+          <p:nvPr>
+            <p:ph idx="1"/>
+          </p:nvPr>
+        </p:nvSpPr>
+        <p:spPr/>
+        <p:txBody>
+          <a:bodyPr/>
+          <a:lstStyle/>
+          <a:p>
+            <a:endParaRPr lang="en-US"/>
+          </a:p>
+        </p:txBody>
+      </p:sp>
+      <p:pic>
+        <p:nvPicPr>
+          <p:cNvPr id="1027" name="Picture 3"/>
+          <p:cNvPicPr>
+            <a:picLocks noChangeAspect="1" noChangeArrowheads="1"/>
+          </p:cNvPicPr>
+          <p:nvPr/>
+        </p:nvPicPr>
+        <p:blipFill>
+          <a:blip r:embed="rId2" cstate="print"/>
+          <a:srcRect/>
+          <a:stretch>
+            <a:fillRect/>
+          </a:stretch>
+        </p:blipFill>
+        <p:spPr bwMode="auto">
+          <a:xfrm>
+            <a:off x="2300288" y="2219325"/>
+            <a:ext cx="4543425" cy="3190875"/>
+          </a:xfrm>
+          <a:prstGeom prst="rect">
+            <a:avLst/>
+          </a:prstGeom>
+          <a:noFill/>
+          <a:ln w="9525">
+            <a:noFill/>
+            <a:miter lim="800000"/>
+            <a:headEnd/>
+            <a:tailEnd/>
+          </a:ln>
+        </p:spPr>
+      </p:pic>
+    </p:spTree>
+  </p:cSld>
+  <p:clrMapOvr>
+    <a:masterClrMapping/>
+  </p:clrMapOvr>
+</p:sld>
+</file>
+
+<file path=ppt/slides/slide12.xml><?xml version="1.0" encoding="utf-8"?>
+<p:sld xmlns:a="http://schemas.openxmlformats.org/drawingml/2006/main" xmlns:r="http://schemas.openxmlformats.org/officeDocument/2006/relationships" xmlns:p="http://schemas.openxmlformats.org/presentationml/2006/main">
+  <p:cSld>
+    <p:spTree>
+      <p:nvGrpSpPr>
+        <p:cNvPr id="1" name=""/>
+        <p:cNvGrpSpPr/>
+        <p:nvPr/>
+      </p:nvGrpSpPr>
+      <p:grpSpPr>
+        <a:xfrm>
+          <a:off x="0" y="0"/>
+          <a:ext cx="0" cy="0"/>
+          <a:chOff x="0" y="0"/>
+          <a:chExt cx="0" cy="0"/>
+        </a:xfrm>
+      </p:grpSpPr>
+      <p:sp>
+        <p:nvSpPr>
+          <p:cNvPr id="2" name="Title 1"/>
+          <p:cNvSpPr>
+            <a:spLocks noGrp="1"/>
+          </p:cNvSpPr>
+          <p:nvPr>
+            <p:ph type="title"/>
+          </p:nvPr>
+        </p:nvSpPr>
+        <p:spPr/>
+        <p:txBody>
+          <a:bodyPr/>
+          <a:lstStyle/>
+          <a:p>
+            <a:r>
+              <a:rPr lang="en-US" dirty="0" err="1" smtClean="0"/>
+              <a:t>DevOps</a:t>
+            </a:r>
+            <a:r>
+              <a:rPr lang="en-US" dirty="0" smtClean="0"/>
+              <a:t> (II)</a:t>
+            </a:r>
+            <a:endParaRPr lang="en-US" dirty="0"/>
+          </a:p>
+        </p:txBody>
+      </p:sp>
+      <p:sp>
+        <p:nvSpPr>
+          <p:cNvPr id="3" name="Content Placeholder 2"/>
+          <p:cNvSpPr>
+            <a:spLocks noGrp="1"/>
+          </p:cNvSpPr>
+          <p:nvPr>
+            <p:ph idx="1"/>
+          </p:nvPr>
+        </p:nvSpPr>
+        <p:spPr/>
+        <p:txBody>
+          <a:bodyPr/>
+          <a:lstStyle/>
+          <a:p>
+            <a:endParaRPr lang="en-US"/>
+          </a:p>
+        </p:txBody>
+      </p:sp>
+      <p:pic>
+        <p:nvPicPr>
+          <p:cNvPr id="2050" name="Picture 2"/>
+          <p:cNvPicPr>
+            <a:picLocks noChangeAspect="1" noChangeArrowheads="1"/>
+          </p:cNvPicPr>
+          <p:nvPr/>
+        </p:nvPicPr>
+        <p:blipFill>
+          <a:blip r:embed="rId2" cstate="print"/>
+          <a:srcRect/>
+          <a:stretch>
+            <a:fillRect/>
+          </a:stretch>
+        </p:blipFill>
+        <p:spPr bwMode="auto">
+          <a:xfrm>
+            <a:off x="2276475" y="1647825"/>
+            <a:ext cx="4591050" cy="4448175"/>
+          </a:xfrm>
+          <a:prstGeom prst="rect">
+            <a:avLst/>
+          </a:prstGeom>
+          <a:noFill/>
+          <a:ln w="9525">
+            <a:noFill/>
+            <a:miter lim="800000"/>
+            <a:headEnd/>
+            <a:tailEnd/>
+          </a:ln>
+        </p:spPr>
+      </p:pic>
+    </p:spTree>
+  </p:cSld>
+  <p:clrMapOvr>
+    <a:masterClrMapping/>
+  </p:clrMapOvr>
+</p:sld>
+</file>
+
+<file path=ppt/slides/slide13.xml><?xml version="1.0" encoding="utf-8"?>
+<p:sld xmlns:a="http://schemas.openxmlformats.org/drawingml/2006/main" xmlns:r="http://schemas.openxmlformats.org/officeDocument/2006/relationships" xmlns:p="http://schemas.openxmlformats.org/presentationml/2006/main">
+  <p:cSld>
+    <p:spTree>
+      <p:nvGrpSpPr>
+        <p:cNvPr id="1" name=""/>
+        <p:cNvGrpSpPr/>
+        <p:nvPr/>
+      </p:nvGrpSpPr>
+      <p:grpSpPr>
+        <a:xfrm>
+          <a:off x="0" y="0"/>
+          <a:ext cx="0" cy="0"/>
+          <a:chOff x="0" y="0"/>
+          <a:chExt cx="0" cy="0"/>
+        </a:xfrm>
+      </p:grpSpPr>
+      <p:sp>
+        <p:nvSpPr>
+          <p:cNvPr id="2" name="Title 1"/>
+          <p:cNvSpPr>
+            <a:spLocks noGrp="1"/>
+          </p:cNvSpPr>
+          <p:nvPr>
+            <p:ph type="title"/>
+          </p:nvPr>
+        </p:nvSpPr>
+        <p:spPr/>
+        <p:txBody>
+          <a:bodyPr/>
+          <a:lstStyle/>
+          <a:p>
+            <a:r>
+              <a:rPr lang="en-US" dirty="0" err="1" smtClean="0"/>
+              <a:t>DevOps</a:t>
+            </a:r>
+            <a:r>
+              <a:rPr lang="en-US" dirty="0" smtClean="0"/>
+              <a:t> (III)</a:t>
+            </a:r>
+            <a:endParaRPr lang="en-US" dirty="0"/>
+          </a:p>
+        </p:txBody>
+      </p:sp>
+      <p:sp>
+        <p:nvSpPr>
+          <p:cNvPr id="3" name="Content Placeholder 2"/>
+          <p:cNvSpPr>
+            <a:spLocks noGrp="1"/>
+          </p:cNvSpPr>
+          <p:nvPr>
+            <p:ph idx="1"/>
+          </p:nvPr>
+        </p:nvSpPr>
+        <p:spPr/>
+        <p:txBody>
+          <a:bodyPr/>
+          <a:lstStyle/>
+          <a:p>
+            <a:endParaRPr lang="en-US"/>
+          </a:p>
+        </p:txBody>
+      </p:sp>
+      <p:pic>
+        <p:nvPicPr>
+          <p:cNvPr id="1026" name="Picture 2"/>
+          <p:cNvPicPr>
+            <a:picLocks noChangeAspect="1" noChangeArrowheads="1"/>
+          </p:cNvPicPr>
+          <p:nvPr/>
+        </p:nvPicPr>
+        <p:blipFill>
+          <a:blip r:embed="rId2" cstate="print"/>
+          <a:srcRect/>
+          <a:stretch>
+            <a:fillRect/>
+          </a:stretch>
+        </p:blipFill>
+        <p:spPr bwMode="auto">
+          <a:xfrm>
+            <a:off x="2667000" y="1600200"/>
+            <a:ext cx="3207068" cy="4651693"/>
+          </a:xfrm>
+          <a:prstGeom prst="rect">
+            <a:avLst/>
+          </a:prstGeom>
+          <a:noFill/>
+          <a:ln w="9525">
+            <a:noFill/>
+            <a:miter lim="800000"/>
+            <a:headEnd/>
+            <a:tailEnd/>
+          </a:ln>
+        </p:spPr>
+      </p:pic>
+    </p:spTree>
+  </p:cSld>
+  <p:clrMapOvr>
+    <a:masterClrMapping/>
+  </p:clrMapOvr>
+</p:sld>
+</file>
+
+<file path=ppt/slides/slide14.xml><?xml version="1.0" encoding="utf-8"?>
+<p:sld xmlns:a="http://schemas.openxmlformats.org/drawingml/2006/main" xmlns:r="http://schemas.openxmlformats.org/officeDocument/2006/relationships" xmlns:p="http://schemas.openxmlformats.org/presentationml/2006/main">
+  <p:cSld>
+    <p:spTree>
+      <p:nvGrpSpPr>
+        <p:cNvPr id="1" name=""/>
+        <p:cNvGrpSpPr/>
+        <p:nvPr/>
+      </p:nvGrpSpPr>
+      <p:grpSpPr>
+        <a:xfrm>
+          <a:off x="0" y="0"/>
+          <a:ext cx="0" cy="0"/>
+          <a:chOff x="0" y="0"/>
+          <a:chExt cx="0" cy="0"/>
+        </a:xfrm>
+      </p:grpSpPr>
+      <p:sp>
+        <p:nvSpPr>
+          <p:cNvPr id="2" name="Title 1"/>
+          <p:cNvSpPr>
+            <a:spLocks noGrp="1"/>
+          </p:cNvSpPr>
+          <p:nvPr>
+            <p:ph type="title"/>
+          </p:nvPr>
+        </p:nvSpPr>
+        <p:spPr/>
+        <p:txBody>
+          <a:bodyPr/>
+          <a:lstStyle/>
+          <a:p>
+            <a:r>
+              <a:rPr lang="en-US" dirty="0" smtClean="0"/>
+              <a:t>Code</a:t>
+            </a:r>
+            <a:endParaRPr lang="en-US" dirty="0"/>
+          </a:p>
+        </p:txBody>
+      </p:sp>
+      <p:sp>
+        <p:nvSpPr>
+          <p:cNvPr id="3" name="Content Placeholder 2"/>
+          <p:cNvSpPr>
+            <a:spLocks noGrp="1"/>
+          </p:cNvSpPr>
+          <p:nvPr>
+            <p:ph idx="1"/>
+          </p:nvPr>
+        </p:nvSpPr>
+        <p:spPr/>
+        <p:txBody>
+          <a:bodyPr/>
+          <a:lstStyle/>
+          <a:p>
+            <a:r>
+              <a:rPr lang="en-US" dirty="0" smtClean="0">
+                <a:hlinkClick r:id="rId2"/>
+              </a:rPr>
+              <a:t>https://github.com/brikis98/devops-book</a:t>
+            </a:r>
+            <a:endParaRPr lang="en-US" dirty="0" smtClean="0"/>
+          </a:p>
+          <a:p>
+            <a:endParaRPr lang="en-US" dirty="0"/>
+          </a:p>
+        </p:txBody>
+      </p:sp>
+    </p:spTree>
+  </p:cSld>
+  <p:clrMapOvr>
+    <a:masterClrMapping/>
+  </p:clrMapOvr>
+</p:sld>
+</file>
+
+<file path=ppt/slides/slide15.xml><?xml version="1.0" encoding="utf-8"?>
 <p:sld xmlns:a="http://schemas.openxmlformats.org/drawingml/2006/main" xmlns:r="http://schemas.openxmlformats.org/officeDocument/2006/relationships" xmlns:p="http://schemas.openxmlformats.org/presentationml/2006/main">
   <p:cSld>
     <p:spTree>
@@ -4141,6 +4529,41 @@
             </a:pPr>
             <a:r>
               <a:rPr lang="en-US" sz="2400" dirty="0" err="1" smtClean="0"/>
+              <a:t>Julien</a:t>
+            </a:r>
+            <a:r>
+              <a:rPr lang="en-US" sz="2400" dirty="0" smtClean="0"/>
+              <a:t> </a:t>
+            </a:r>
+            <a:r>
+              <a:rPr lang="en-US" sz="2400" dirty="0" err="1" smtClean="0"/>
+              <a:t>Vehent</a:t>
+            </a:r>
+            <a:r>
+              <a:rPr lang="en-US" sz="2400" dirty="0" smtClean="0"/>
+              <a:t> (2018). Securing </a:t>
+            </a:r>
+            <a:r>
+              <a:rPr lang="en-US" sz="2400" dirty="0" err="1" smtClean="0"/>
+              <a:t>DevOps</a:t>
+            </a:r>
+            <a:r>
+              <a:rPr lang="en-US" sz="2400" dirty="0" smtClean="0"/>
+              <a:t>. Manning </a:t>
+            </a:r>
+            <a:r>
+              <a:rPr lang="en-US" sz="2400" dirty="0" smtClean="0"/>
+              <a:t>Publications.</a:t>
+            </a:r>
+            <a:endParaRPr lang="en-US" sz="2400" dirty="0" smtClean="0"/>
+          </a:p>
+          <a:p>
+            <a:pPr marL="457200" indent="-457200">
+              <a:buFont typeface="+mj-lt"/>
+              <a:buAutoNum type="arabicPeriod"/>
+            </a:pPr>
+            <a:r>
+              <a:rPr lang="en-US" sz="2400" dirty="0" err="1" smtClean="0"/>
               <a:t>Yevgeniy</a:t>
             </a:r>
             <a:r>
@@ -4215,15 +4638,15 @@
           <a:p>
             <a:r>
               <a:rPr lang="en-US" dirty="0" smtClean="0"/>
-              <a:t>Deploy an App via </a:t>
+              <a:t>What is </a:t>
             </a:r>
             <a:r>
               <a:rPr lang="en-US" dirty="0" err="1" smtClean="0"/>
-              <a:t>PaaS</a:t>
+              <a:t>DevOps</a:t>
             </a:r>
             <a:r>
               <a:rPr lang="en-US" dirty="0" smtClean="0"/>
-              <a:t> (Render)</a:t>
+              <a:t>? [1]</a:t>
             </a:r>
             <a:endParaRPr lang="en-US" dirty="0"/>
           </a:p>
@@ -4241,10 +4664,59 @@
         </p:nvSpPr>
         <p:spPr/>
         <p:txBody>
-          <a:bodyPr/>
-          <a:lstStyle/>
-          <a:p>
-            <a:endParaRPr lang="en-US"/>
+          <a:bodyPr>
+            <a:normAutofit/>
+          </a:bodyPr>
+          <a:lstStyle/>
+          <a:p>
+            <a:r>
+              <a:rPr lang="en-US" sz="2400" dirty="0" err="1" smtClean="0"/>
+              <a:t>DevOps</a:t>
+            </a:r>
+            <a:r>
+              <a:rPr lang="en-US" sz="2400" dirty="0" smtClean="0"/>
+              <a:t> is the process of continuously improving software products through rapid release cycles, global automation of integration and delivery pipelines, and close collaboration between teams.</a:t>
+            </a:r>
+          </a:p>
+          <a:p>
+            <a:r>
+              <a:rPr lang="en-US" sz="2400" dirty="0" smtClean="0"/>
+              <a:t>The goal of </a:t>
+            </a:r>
+            <a:r>
+              <a:rPr lang="en-US" sz="2400" dirty="0" err="1" smtClean="0"/>
+              <a:t>DevOps</a:t>
+            </a:r>
+            <a:r>
+              <a:rPr lang="en-US" sz="2400" dirty="0" smtClean="0"/>
+              <a:t> is to shorten the time and reduce the cost of transforming an idea into a product that customers use.</a:t>
+            </a:r>
+          </a:p>
+          <a:p>
+            <a:r>
+              <a:rPr lang="en-US" sz="2400" dirty="0" err="1" smtClean="0"/>
+              <a:t>DevOps</a:t>
+            </a:r>
+            <a:r>
+              <a:rPr lang="en-US" sz="2400" dirty="0" smtClean="0"/>
+              <a:t> makes heavy use of </a:t>
+            </a:r>
+            <a:r>
+              <a:rPr lang="en-US" sz="2400" i="1" dirty="0" smtClean="0">
+                <a:solidFill>
+                  <a:srgbClr val="C00000"/>
+                </a:solidFill>
+              </a:rPr>
+              <a:t>automated processes</a:t>
+            </a:r>
+            <a:r>
+              <a:rPr lang="en-US" sz="2400" dirty="0" smtClean="0"/>
+              <a:t> to speed up development and deployment</a:t>
+            </a:r>
+            <a:r>
+              <a:rPr lang="en-US" sz="2400" dirty="0" smtClean="0"/>
+              <a:t>.</a:t>
+            </a:r>
           </a:p>
         </p:txBody>
       </p:sp>
@@ -4290,15 +4762,19 @@
           <a:p>
             <a:r>
               <a:rPr lang="en-US" dirty="0" smtClean="0"/>
-              <a:t>Deploy an App via </a:t>
+              <a:t>Traditional </a:t>
+            </a:r>
+            <a:r>
+              <a:rPr lang="en-US" dirty="0" smtClean="0"/>
+              <a:t>Software-building Approach </a:t>
+            </a:r>
+            <a:r>
+              <a:rPr lang="en-US" dirty="0" smtClean="0"/>
+              <a:t>vs. </a:t>
             </a:r>
             <a:r>
               <a:rPr lang="en-US" dirty="0" err="1" smtClean="0"/>
-              <a:t>IaaS</a:t>
-            </a:r>
-            <a:r>
-              <a:rPr lang="en-US" dirty="0" smtClean="0"/>
-              <a:t> (AWS)</a:t>
+              <a:t>DevOps</a:t>
             </a:r>
             <a:endParaRPr lang="en-US" dirty="0"/>
           </a:p>
@@ -4316,10 +4792,107 @@
         </p:nvSpPr>
         <p:spPr/>
         <p:txBody>
-          <a:bodyPr/>
-          <a:lstStyle/>
-          <a:p>
-            <a:endParaRPr lang="en-US"/>
+          <a:bodyPr>
+            <a:normAutofit/>
+          </a:bodyPr>
+          <a:lstStyle/>
+          <a:p>
+            <a:r>
+              <a:rPr lang="en-US" sz="2400" dirty="0" smtClean="0"/>
+              <a:t>8 days vs. 2 days.</a:t>
+            </a:r>
+            <a:endParaRPr lang="en-US" sz="2400" dirty="0"/>
+          </a:p>
+        </p:txBody>
+      </p:sp>
+      <p:pic>
+        <p:nvPicPr>
+          <p:cNvPr id="4" name="Picture 2"/>
+          <p:cNvPicPr>
+            <a:picLocks noChangeAspect="1" noChangeArrowheads="1"/>
+          </p:cNvPicPr>
+          <p:nvPr/>
+        </p:nvPicPr>
+        <p:blipFill>
+          <a:blip r:embed="rId2" cstate="print"/>
+          <a:srcRect/>
+          <a:stretch>
+            <a:fillRect/>
+          </a:stretch>
+        </p:blipFill>
+        <p:spPr bwMode="auto">
+          <a:xfrm>
+            <a:off x="784225" y="2133600"/>
+            <a:ext cx="7575550" cy="3867150"/>
+          </a:xfrm>
+          <a:prstGeom prst="rect">
+            <a:avLst/>
+          </a:prstGeom>
+          <a:noFill/>
+          <a:ln w="9525">
+            <a:noFill/>
+            <a:miter lim="800000"/>
+            <a:headEnd/>
+            <a:tailEnd/>
+          </a:ln>
+        </p:spPr>
+      </p:pic>
+      <p:sp>
+        <p:nvSpPr>
+          <p:cNvPr id="5" name="Rectangle 4"/>
+          <p:cNvSpPr/>
+          <p:nvPr/>
+        </p:nvSpPr>
+        <p:spPr>
+          <a:xfrm>
+            <a:off x="5257800" y="4191000"/>
+            <a:ext cx="3657600" cy="2062103"/>
+          </a:xfrm>
+          <a:prstGeom prst="rect">
+            <a:avLst/>
+          </a:prstGeom>
+        </p:spPr>
+        <p:style>
+          <a:lnRef idx="2">
+            <a:schemeClr val="dk1"/>
+          </a:lnRef>
+          <a:fillRef idx="1">
+            <a:schemeClr val="lt1"/>
+          </a:fillRef>
+          <a:effectRef idx="0">
+            <a:schemeClr val="dk1"/>
+          </a:effectRef>
+          <a:fontRef idx="minor">
+            <a:schemeClr val="dk1"/>
+          </a:fontRef>
+        </p:style>
+        <p:txBody>
+          <a:bodyPr wrap="square">
+            <a:spAutoFit/>
+          </a:bodyPr>
+          <a:lstStyle/>
+          <a:p>
+            <a:r>
+              <a:rPr lang="en-US" sz="1600" dirty="0" smtClean="0"/>
+              <a:t>With </a:t>
+            </a:r>
+            <a:r>
+              <a:rPr lang="en-US" sz="1600" dirty="0" err="1" smtClean="0"/>
+              <a:t>DevOps</a:t>
+            </a:r>
+            <a:r>
+              <a:rPr lang="en-US" sz="1600" dirty="0" smtClean="0"/>
+              <a:t>, developers can release new versions of their software, test them, and deploy them to customers in as little as a few hours. That doesn’t mean versions are always released that quickly, and it can take time to do proper quality assurance (QA), but </a:t>
+            </a:r>
+            <a:r>
+              <a:rPr lang="en-US" sz="1600" dirty="0" err="1" smtClean="0"/>
+              <a:t>DevOps</a:t>
+            </a:r>
+            <a:r>
+              <a:rPr lang="en-US" sz="1600" dirty="0" smtClean="0"/>
+              <a:t> provides the ability to move quickly if needed.</a:t>
+            </a:r>
+            <a:endParaRPr lang="en-US" sz="1600" dirty="0"/>
           </a:p>
         </p:txBody>
       </p:sp>
@@ -4364,39 +4937,61 @@
           <a:lstStyle/>
           <a:p>
             <a:r>
-              <a:rPr lang="en-US" dirty="0" err="1" smtClean="0"/>
+              <a:rPr lang="en-US" dirty="0" smtClean="0"/>
+              <a:t>The </a:t>
+            </a:r>
+            <a:r>
+              <a:rPr lang="en-US" dirty="0" smtClean="0"/>
+              <a:t>Key Components</a:t>
+            </a:r>
+            <a:endParaRPr lang="en-US" dirty="0"/>
+          </a:p>
+        </p:txBody>
+      </p:sp>
+      <p:sp>
+        <p:nvSpPr>
+          <p:cNvPr id="3" name="Content Placeholder 2"/>
+          <p:cNvSpPr>
+            <a:spLocks noGrp="1"/>
+          </p:cNvSpPr>
+          <p:nvPr>
+            <p:ph idx="1"/>
+          </p:nvPr>
+        </p:nvSpPr>
+        <p:spPr/>
+        <p:txBody>
+          <a:bodyPr>
+            <a:normAutofit/>
+          </a:bodyPr>
+          <a:lstStyle/>
+          <a:p>
+            <a:r>
+              <a:rPr lang="en-US" sz="2200" dirty="0" smtClean="0"/>
+              <a:t>Continuous integration (CI), continuous delivery (CD), and infrastructure as a service (</a:t>
+            </a:r>
+            <a:r>
+              <a:rPr lang="en-US" sz="2200" dirty="0" err="1" smtClean="0"/>
+              <a:t>IaaS</a:t>
+            </a:r>
+            <a:r>
+              <a:rPr lang="en-US" sz="2200" dirty="0" smtClean="0"/>
+              <a:t>) form an automated pipeline that allows </a:t>
+            </a:r>
+            <a:r>
+              <a:rPr lang="en-US" sz="2200" dirty="0" err="1" smtClean="0"/>
               <a:t>DevOps</a:t>
             </a:r>
             <a:r>
-              <a:rPr lang="en-US" dirty="0" smtClean="0"/>
-              <a:t> (I) [1]</a:t>
-            </a:r>
-            <a:endParaRPr lang="en-US" dirty="0"/>
-          </a:p>
-        </p:txBody>
-      </p:sp>
-      <p:sp>
-        <p:nvSpPr>
-          <p:cNvPr id="3" name="Content Placeholder 2"/>
-          <p:cNvSpPr>
-            <a:spLocks noGrp="1"/>
-          </p:cNvSpPr>
-          <p:nvPr>
-            <p:ph idx="1"/>
-          </p:nvPr>
-        </p:nvSpPr>
-        <p:spPr/>
-        <p:txBody>
-          <a:bodyPr/>
-          <a:lstStyle/>
-          <a:p>
-            <a:endParaRPr lang="en-US"/>
+              <a:rPr lang="en-US" sz="2200" dirty="0" smtClean="0"/>
+              <a:t> to speed up the process of testing and deploying software.</a:t>
+            </a:r>
+            <a:endParaRPr lang="en-US" sz="2200" dirty="0"/>
           </a:p>
         </p:txBody>
       </p:sp>
       <p:pic>
         <p:nvPicPr>
-          <p:cNvPr id="1027" name="Picture 3"/>
+          <p:cNvPr id="2050" name="Picture 2"/>
           <p:cNvPicPr>
             <a:picLocks noChangeAspect="1" noChangeArrowheads="1"/>
           </p:cNvPicPr>
@@ -4411,8 +5006,8 @@
         </p:blipFill>
         <p:spPr bwMode="auto">
           <a:xfrm>
-            <a:off x="2300288" y="2219325"/>
-            <a:ext cx="4543425" cy="3190875"/>
+            <a:off x="1371600" y="3124200"/>
+            <a:ext cx="6670675" cy="2987675"/>
           </a:xfrm>
           <a:prstGeom prst="rect">
             <a:avLst/>
@@ -4466,15 +5061,7 @@
           <a:bodyPr/>
           <a:lstStyle/>
           <a:p>
-            <a:r>
-              <a:rPr lang="en-US" dirty="0" err="1" smtClean="0"/>
-              <a:t>DevOps</a:t>
-            </a:r>
-            <a:r>
-              <a:rPr lang="en-US" dirty="0" smtClean="0"/>
-              <a:t> (II)</a:t>
-            </a:r>
-            <a:endParaRPr lang="en-US" dirty="0"/>
+            <a:endParaRPr lang="en-US"/>
           </a:p>
         </p:txBody>
       </p:sp>
@@ -4497,38 +5084,6 @@
           </a:p>
         </p:txBody>
       </p:sp>
-      <p:pic>
-        <p:nvPicPr>
-          <p:cNvPr id="2050" name="Picture 2"/>
-          <p:cNvPicPr>
-            <a:picLocks noChangeAspect="1" noChangeArrowheads="1"/>
-          </p:cNvPicPr>
-          <p:nvPr/>
-        </p:nvPicPr>
-        <p:blipFill>
-          <a:blip r:embed="rId2" cstate="print"/>
-          <a:srcRect/>
-          <a:stretch>
-            <a:fillRect/>
-          </a:stretch>
-        </p:blipFill>
-        <p:spPr bwMode="auto">
-          <a:xfrm>
-            <a:off x="2276475" y="1647825"/>
-            <a:ext cx="4591050" cy="4448175"/>
-          </a:xfrm>
-          <a:prstGeom prst="rect">
-            <a:avLst/>
-          </a:prstGeom>
-          <a:noFill/>
-          <a:ln w="9525">
-            <a:noFill/>
-            <a:miter lim="800000"/>
-            <a:headEnd/>
-            <a:tailEnd/>
-          </a:ln>
-        </p:spPr>
-      </p:pic>
     </p:spTree>
   </p:cSld>
   <p:clrMapOvr>
@@ -4570,12 +5125,16 @@
           <a:lstStyle/>
           <a:p>
             <a:r>
+              <a:rPr lang="en-US" dirty="0" smtClean="0"/>
+              <a:t>Deploy an App via </a:t>
+            </a:r>
+            <a:r>
               <a:rPr lang="en-US" dirty="0" err="1" smtClean="0"/>
-              <a:t>DevOps</a:t>
+              <a:t>PaaS</a:t>
             </a:r>
             <a:r>
               <a:rPr lang="en-US" dirty="0" smtClean="0"/>
-              <a:t> (III)</a:t>
+              <a:t> (Render)</a:t>
             </a:r>
             <a:endParaRPr lang="en-US" dirty="0"/>
           </a:p>
@@ -4600,38 +5159,6 @@
           </a:p>
         </p:txBody>
       </p:sp>
-      <p:pic>
-        <p:nvPicPr>
-          <p:cNvPr id="1026" name="Picture 2"/>
-          <p:cNvPicPr>
-            <a:picLocks noChangeAspect="1" noChangeArrowheads="1"/>
-          </p:cNvPicPr>
-          <p:nvPr/>
-        </p:nvPicPr>
-        <p:blipFill>
-          <a:blip r:embed="rId2" cstate="print"/>
-          <a:srcRect/>
-          <a:stretch>
-            <a:fillRect/>
-          </a:stretch>
-        </p:blipFill>
-        <p:spPr bwMode="auto">
-          <a:xfrm>
-            <a:off x="2667000" y="1600200"/>
-            <a:ext cx="3207068" cy="4651693"/>
-          </a:xfrm>
-          <a:prstGeom prst="rect">
-            <a:avLst/>
-          </a:prstGeom>
-          <a:noFill/>
-          <a:ln w="9525">
-            <a:noFill/>
-            <a:miter lim="800000"/>
-            <a:headEnd/>
-            <a:tailEnd/>
-          </a:ln>
-        </p:spPr>
-      </p:pic>
     </p:spTree>
   </p:cSld>
   <p:clrMapOvr>

--- a/Software Project Management/07.03. Deployment Management.pptx
+++ b/Software Project Management/07.03. Deployment Management.pptx
@@ -5,7 +5,7 @@
     <p:sldMasterId id="2147483648" r:id="rId1"/>
   </p:sldMasterIdLst>
   <p:notesMasterIdLst>
-    <p:notesMasterId r:id="rId17"/>
+    <p:notesMasterId r:id="rId16"/>
   </p:notesMasterIdLst>
   <p:sldIdLst>
     <p:sldId id="331" r:id="rId2"/>
@@ -15,14 +15,13 @@
     <p:sldId id="342" r:id="rId6"/>
     <p:sldId id="343" r:id="rId7"/>
     <p:sldId id="344" r:id="rId8"/>
-    <p:sldId id="345" r:id="rId9"/>
-    <p:sldId id="335" r:id="rId10"/>
-    <p:sldId id="336" r:id="rId11"/>
-    <p:sldId id="337" r:id="rId12"/>
-    <p:sldId id="339" r:id="rId13"/>
-    <p:sldId id="338" r:id="rId14"/>
-    <p:sldId id="340" r:id="rId15"/>
-    <p:sldId id="308" r:id="rId16"/>
+    <p:sldId id="335" r:id="rId9"/>
+    <p:sldId id="336" r:id="rId10"/>
+    <p:sldId id="337" r:id="rId11"/>
+    <p:sldId id="339" r:id="rId12"/>
+    <p:sldId id="338" r:id="rId13"/>
+    <p:sldId id="340" r:id="rId14"/>
+    <p:sldId id="308" r:id="rId15"/>
   </p:sldIdLst>
   <p:sldSz cx="9144000" cy="6858000" type="screen4x3"/>
   <p:notesSz cx="6858000" cy="9144000"/>
@@ -3675,87 +3674,20 @@
           <a:lstStyle/>
           <a:p>
             <a:r>
-              <a:rPr lang="en-US" dirty="0" smtClean="0"/>
-              <a:t>Deploy an App via </a:t>
-            </a:r>
-            <a:r>
-              <a:rPr lang="en-US" dirty="0" err="1" smtClean="0"/>
-              <a:t>IaaS</a:t>
-            </a:r>
-            <a:r>
-              <a:rPr lang="en-US" dirty="0" smtClean="0"/>
-              <a:t> (AWS)</a:t>
-            </a:r>
-            <a:endParaRPr lang="en-US" dirty="0"/>
-          </a:p>
-        </p:txBody>
-      </p:sp>
-      <p:sp>
-        <p:nvSpPr>
-          <p:cNvPr id="3" name="Content Placeholder 2"/>
-          <p:cNvSpPr>
-            <a:spLocks noGrp="1"/>
-          </p:cNvSpPr>
-          <p:nvPr>
-            <p:ph idx="1"/>
-          </p:nvPr>
-        </p:nvSpPr>
-        <p:spPr/>
-        <p:txBody>
-          <a:bodyPr/>
-          <a:lstStyle/>
-          <a:p>
-            <a:endParaRPr lang="en-US"/>
-          </a:p>
-        </p:txBody>
-      </p:sp>
-    </p:spTree>
-  </p:cSld>
-  <p:clrMapOvr>
-    <a:masterClrMapping/>
-  </p:clrMapOvr>
-</p:sld>
-</file>
-
-<file path=ppt/slides/slide11.xml><?xml version="1.0" encoding="utf-8"?>
-<p:sld xmlns:a="http://schemas.openxmlformats.org/drawingml/2006/main" xmlns:r="http://schemas.openxmlformats.org/officeDocument/2006/relationships" xmlns:p="http://schemas.openxmlformats.org/presentationml/2006/main">
-  <p:cSld>
-    <p:spTree>
-      <p:nvGrpSpPr>
-        <p:cNvPr id="1" name=""/>
-        <p:cNvGrpSpPr/>
-        <p:nvPr/>
-      </p:nvGrpSpPr>
-      <p:grpSpPr>
-        <a:xfrm>
-          <a:off x="0" y="0"/>
-          <a:ext cx="0" cy="0"/>
-          <a:chOff x="0" y="0"/>
-          <a:chExt cx="0" cy="0"/>
-        </a:xfrm>
-      </p:grpSpPr>
-      <p:sp>
-        <p:nvSpPr>
-          <p:cNvPr id="2" name="Title 1"/>
-          <p:cNvSpPr>
-            <a:spLocks noGrp="1"/>
-          </p:cNvSpPr>
-          <p:nvPr>
-            <p:ph type="title"/>
-          </p:nvPr>
-        </p:nvSpPr>
-        <p:spPr/>
-        <p:txBody>
-          <a:bodyPr/>
-          <a:lstStyle/>
-          <a:p>
-            <a:r>
               <a:rPr lang="en-US" dirty="0" err="1" smtClean="0"/>
               <a:t>DevOps</a:t>
             </a:r>
             <a:r>
               <a:rPr lang="en-US" dirty="0" smtClean="0"/>
-              <a:t> (I) [1]</a:t>
+              <a:t> (I</a:t>
+            </a:r>
+            <a:r>
+              <a:rPr lang="en-US" smtClean="0"/>
+              <a:t>) </a:t>
+            </a:r>
+            <a:r>
+              <a:rPr lang="en-US" smtClean="0"/>
+              <a:t>[2]</a:t>
             </a:r>
             <a:endParaRPr lang="en-US" dirty="0"/>
           </a:p>
@@ -3820,7 +3752,7 @@
 </p:sld>
 </file>
 
-<file path=ppt/slides/slide12.xml><?xml version="1.0" encoding="utf-8"?>
+<file path=ppt/slides/slide11.xml><?xml version="1.0" encoding="utf-8"?>
 <p:sld xmlns:a="http://schemas.openxmlformats.org/drawingml/2006/main" xmlns:r="http://schemas.openxmlformats.org/officeDocument/2006/relationships" xmlns:p="http://schemas.openxmlformats.org/presentationml/2006/main">
   <p:cSld>
     <p:spTree>
@@ -3923,7 +3855,7 @@
 </p:sld>
 </file>
 
-<file path=ppt/slides/slide13.xml><?xml version="1.0" encoding="utf-8"?>
+<file path=ppt/slides/slide12.xml><?xml version="1.0" encoding="utf-8"?>
 <p:sld xmlns:a="http://schemas.openxmlformats.org/drawingml/2006/main" xmlns:r="http://schemas.openxmlformats.org/officeDocument/2006/relationships" xmlns:p="http://schemas.openxmlformats.org/presentationml/2006/main">
   <p:cSld>
     <p:spTree>
@@ -4026,7 +3958,7 @@
 </p:sld>
 </file>
 
-<file path=ppt/slides/slide14.xml><?xml version="1.0" encoding="utf-8"?>
+<file path=ppt/slides/slide13.xml><?xml version="1.0" encoding="utf-8"?>
 <p:sld xmlns:a="http://schemas.openxmlformats.org/drawingml/2006/main" xmlns:r="http://schemas.openxmlformats.org/officeDocument/2006/relationships" xmlns:p="http://schemas.openxmlformats.org/presentationml/2006/main">
   <p:cSld>
     <p:spTree>
@@ -4102,7 +4034,7 @@
 </p:sld>
 </file>
 
-<file path=ppt/slides/slide15.xml><?xml version="1.0" encoding="utf-8"?>
+<file path=ppt/slides/slide14.xml><?xml version="1.0" encoding="utf-8"?>
 <p:sld xmlns:a="http://schemas.openxmlformats.org/drawingml/2006/main" xmlns:r="http://schemas.openxmlformats.org/officeDocument/2006/relationships" xmlns:p="http://schemas.openxmlformats.org/presentationml/2006/main">
   <p:cSld>
     <p:spTree>
@@ -5061,7 +4993,19 @@
           <a:bodyPr/>
           <a:lstStyle/>
           <a:p>
-            <a:endParaRPr lang="en-US"/>
+            <a:r>
+              <a:rPr lang="en-US" dirty="0" smtClean="0"/>
+              <a:t>Deploy an App via </a:t>
+            </a:r>
+            <a:r>
+              <a:rPr lang="en-US" dirty="0" err="1" smtClean="0"/>
+              <a:t>PaaS</a:t>
+            </a:r>
+            <a:r>
+              <a:rPr lang="en-US" dirty="0" smtClean="0"/>
+              <a:t> (Render)</a:t>
+            </a:r>
+            <a:endParaRPr lang="en-US" dirty="0"/>
           </a:p>
         </p:txBody>
       </p:sp>
@@ -5130,11 +5074,11 @@
             </a:r>
             <a:r>
               <a:rPr lang="en-US" dirty="0" err="1" smtClean="0"/>
-              <a:t>PaaS</a:t>
+              <a:t>IaaS</a:t>
             </a:r>
             <a:r>
               <a:rPr lang="en-US" dirty="0" smtClean="0"/>
-              <a:t> (Render)</a:t>
+              <a:t> (AWS)</a:t>
             </a:r>
             <a:endParaRPr lang="en-US" dirty="0"/>
           </a:p>
